--- a/Activities/Presentations/Lab 3.pptx
+++ b/Activities/Presentations/Lab 3.pptx
@@ -118,7 +118,7 @@
   </p:defaultTextStyle>
   <p:extLst>
     <p:ext uri="{EFAFB233-063F-42B5-8137-9DF3F51BA10A}">
-      <p15:sldGuideLst xmlns:p15="http://schemas.microsoft.com/office/powerpoint/2012/main" xmlns="">
+      <p15:sldGuideLst xmlns:p15="http://schemas.microsoft.com/office/powerpoint/2012/main">
         <p15:guide id="1" orient="horz" pos="2160">
           <p15:clr>
             <a:srgbClr val="A4A3A4"/>
@@ -359,7 +359,7 @@
           <a:p>
             <a:fld id="{F889846D-D1B1-4FA7-8A7C-C08658FC4A10}" type="datetimeFigureOut">
               <a:rPr lang="en-US" smtClean="0"/>
-              <a:t>02/06/2020</a:t>
+              <a:t>6/28/2020</a:t>
             </a:fld>
             <a:endParaRPr lang="en-US"/>
           </a:p>
@@ -527,7 +527,7 @@
           <a:p>
             <a:fld id="{F889846D-D1B1-4FA7-8A7C-C08658FC4A10}" type="datetimeFigureOut">
               <a:rPr lang="en-US" smtClean="0"/>
-              <a:t>02/06/2020</a:t>
+              <a:t>6/28/2020</a:t>
             </a:fld>
             <a:endParaRPr lang="en-US"/>
           </a:p>
@@ -705,7 +705,7 @@
           <a:p>
             <a:fld id="{F889846D-D1B1-4FA7-8A7C-C08658FC4A10}" type="datetimeFigureOut">
               <a:rPr lang="en-US" smtClean="0"/>
-              <a:t>02/06/2020</a:t>
+              <a:t>6/28/2020</a:t>
             </a:fld>
             <a:endParaRPr lang="en-US"/>
           </a:p>
@@ -873,7 +873,7 @@
           <a:p>
             <a:fld id="{F889846D-D1B1-4FA7-8A7C-C08658FC4A10}" type="datetimeFigureOut">
               <a:rPr lang="en-US" smtClean="0"/>
-              <a:t>02/06/2020</a:t>
+              <a:t>6/28/2020</a:t>
             </a:fld>
             <a:endParaRPr lang="en-US"/>
           </a:p>
@@ -1118,7 +1118,7 @@
           <a:p>
             <a:fld id="{F889846D-D1B1-4FA7-8A7C-C08658FC4A10}" type="datetimeFigureOut">
               <a:rPr lang="en-US" smtClean="0"/>
-              <a:t>02/06/2020</a:t>
+              <a:t>6/28/2020</a:t>
             </a:fld>
             <a:endParaRPr lang="en-US"/>
           </a:p>
@@ -1403,7 +1403,7 @@
           <a:p>
             <a:fld id="{F889846D-D1B1-4FA7-8A7C-C08658FC4A10}" type="datetimeFigureOut">
               <a:rPr lang="en-US" smtClean="0"/>
-              <a:t>02/06/2020</a:t>
+              <a:t>6/28/2020</a:t>
             </a:fld>
             <a:endParaRPr lang="en-US"/>
           </a:p>
@@ -1822,7 +1822,7 @@
           <a:p>
             <a:fld id="{F889846D-D1B1-4FA7-8A7C-C08658FC4A10}" type="datetimeFigureOut">
               <a:rPr lang="en-US" smtClean="0"/>
-              <a:t>02/06/2020</a:t>
+              <a:t>6/28/2020</a:t>
             </a:fld>
             <a:endParaRPr lang="en-US"/>
           </a:p>
@@ -1939,7 +1939,7 @@
           <a:p>
             <a:fld id="{F889846D-D1B1-4FA7-8A7C-C08658FC4A10}" type="datetimeFigureOut">
               <a:rPr lang="en-US" smtClean="0"/>
-              <a:t>02/06/2020</a:t>
+              <a:t>6/28/2020</a:t>
             </a:fld>
             <a:endParaRPr lang="en-US"/>
           </a:p>
@@ -2034,7 +2034,7 @@
           <a:p>
             <a:fld id="{F889846D-D1B1-4FA7-8A7C-C08658FC4A10}" type="datetimeFigureOut">
               <a:rPr lang="en-US" smtClean="0"/>
-              <a:t>02/06/2020</a:t>
+              <a:t>6/28/2020</a:t>
             </a:fld>
             <a:endParaRPr lang="en-US"/>
           </a:p>
@@ -2309,7 +2309,7 @@
           <a:p>
             <a:fld id="{F889846D-D1B1-4FA7-8A7C-C08658FC4A10}" type="datetimeFigureOut">
               <a:rPr lang="en-US" smtClean="0"/>
-              <a:t>02/06/2020</a:t>
+              <a:t>6/28/2020</a:t>
             </a:fld>
             <a:endParaRPr lang="en-US"/>
           </a:p>
@@ -2561,7 +2561,7 @@
           <a:p>
             <a:fld id="{F889846D-D1B1-4FA7-8A7C-C08658FC4A10}" type="datetimeFigureOut">
               <a:rPr lang="en-US" smtClean="0"/>
-              <a:t>02/06/2020</a:t>
+              <a:t>6/28/2020</a:t>
             </a:fld>
             <a:endParaRPr lang="en-US"/>
           </a:p>
@@ -2772,7 +2772,7 @@
           <a:p>
             <a:fld id="{F889846D-D1B1-4FA7-8A7C-C08658FC4A10}" type="datetimeFigureOut">
               <a:rPr lang="en-US" smtClean="0"/>
-              <a:t>02/06/2020</a:t>
+              <a:t>6/28/2020</a:t>
             </a:fld>
             <a:endParaRPr lang="en-US"/>
           </a:p>
@@ -3211,13 +3211,6 @@
   <p:clrMapOvr>
     <a:masterClrMapping/>
   </p:clrMapOvr>
-  <p:timing>
-    <p:tnLst>
-      <p:par>
-        <p:cTn id="1" dur="indefinite" restart="never" nodeType="tmRoot"/>
-      </p:par>
-    </p:tnLst>
-  </p:timing>
 </p:sld>
 </file>
 
@@ -3282,29 +3275,24 @@
           <a:lstStyle/>
           <a:p>
             <a:r>
-              <a:rPr lang="en-US" dirty="0" smtClean="0"/>
+              <a:rPr lang="en-US" dirty="0"/>
               <a:t>Can you see how </a:t>
             </a:r>
             <a:r>
-              <a:rPr lang="en-US" dirty="0" err="1" smtClean="0"/>
+              <a:rPr lang="en-US" dirty="0" err="1"/>
               <a:t>Pade</a:t>
             </a:r>
             <a:r>
-              <a:rPr lang="en-US" dirty="0" smtClean="0"/>
+              <a:rPr lang="en-US" dirty="0"/>
               <a:t> actually linearize the nonlinear TDTC model?</a:t>
             </a:r>
           </a:p>
           <a:p>
             <a:pPr lvl="1"/>
             <a:r>
-              <a:rPr lang="en-US" dirty="0" smtClean="0"/>
-              <a:t>Do you reme</a:t>
-            </a:r>
-            <a:r>
-              <a:rPr lang="en-US" dirty="0" smtClean="0"/>
-              <a:t>mber the Gibb’s phenomenon?</a:t>
-            </a:r>
-            <a:endParaRPr lang="en-US" dirty="0"/>
+              <a:rPr lang="en-US" dirty="0"/>
+              <a:t>Do you remember the Gibb’s phenomenon?</a:t>
+            </a:r>
           </a:p>
         </p:txBody>
       </p:sp>
@@ -3318,13 +3306,6 @@
   <p:clrMapOvr>
     <a:masterClrMapping/>
   </p:clrMapOvr>
-  <p:timing>
-    <p:tnLst>
-      <p:par>
-        <p:cTn id="1" dur="indefinite" restart="never" nodeType="tmRoot"/>
-      </p:par>
-    </p:tnLst>
-  </p:timing>
 </p:sld>
 </file>
 
@@ -3713,13 +3694,6 @@
   <p:clrMapOvr>
     <a:masterClrMapping/>
   </p:clrMapOvr>
-  <p:timing>
-    <p:tnLst>
-      <p:par>
-        <p:cTn id="1" dur="indefinite" restart="never" nodeType="tmRoot"/>
-      </p:par>
-    </p:tnLst>
-  </p:timing>
 </p:sld>
 </file>
 
@@ -3908,13 +3882,6 @@
   <p:clrMapOvr>
     <a:masterClrMapping/>
   </p:clrMapOvr>
-  <p:timing>
-    <p:tnLst>
-      <p:par>
-        <p:cTn id="1" dur="indefinite" restart="never" nodeType="tmRoot"/>
-      </p:par>
-    </p:tnLst>
-  </p:timing>
 </p:sld>
 </file>
 
@@ -3958,25 +3925,8 @@
           <a:p>
             <a:r>
               <a:rPr lang="en-US" dirty="0"/>
-              <a:t>You might </a:t>
-            </a:r>
-            <a:r>
-              <a:rPr lang="en-US" dirty="0" smtClean="0"/>
-              <a:t>need</a:t>
-            </a:r>
-            <a:r>
-              <a:rPr lang="en-US" dirty="0" smtClean="0"/>
-              <a:t> </a:t>
-            </a:r>
-            <a:r>
-              <a:rPr lang="en-US" dirty="0"/>
-              <a:t>to reduce the sampling time to 10ms</a:t>
-            </a:r>
-            <a:r>
-              <a:rPr lang="en-US" dirty="0" smtClean="0"/>
-              <a:t>. Check if the overrun LED is on.</a:t>
-            </a:r>
-            <a:endParaRPr lang="en-US" dirty="0"/>
+              <a:t>You might need to reduce the sampling time to 10ms. Check if the overrun LED is on.</a:t>
+            </a:r>
           </a:p>
           <a:p>
             <a:endParaRPr lang="en-US" dirty="0"/>
@@ -4087,13 +4037,6 @@
   <p:clrMapOvr>
     <a:masterClrMapping/>
   </p:clrMapOvr>
-  <p:timing>
-    <p:tnLst>
-      <p:par>
-        <p:cTn id="1" dur="indefinite" restart="never" nodeType="tmRoot"/>
-      </p:par>
-    </p:tnLst>
-  </p:timing>
 </p:sld>
 </file>
 
@@ -4151,8 +4094,8 @@
           </a:p>
         </p:txBody>
       </p:sp>
-      <mc:AlternateContent xmlns:mc="http://schemas.openxmlformats.org/markup-compatibility/2006" xmlns:a14="http://schemas.microsoft.com/office/drawing/2010/main">
-        <mc:Choice Requires="a14">
+      <mc:AlternateContent xmlns:mc="http://schemas.openxmlformats.org/markup-compatibility/2006">
+        <mc:Choice xmlns:a14="http://schemas.microsoft.com/office/drawing/2010/main" Requires="a14">
           <p:sp>
             <p:nvSpPr>
               <p:cNvPr id="3" name="Content Placeholder 2"/>
@@ -4179,17 +4122,42 @@
                       <m:jc m:val="left"/>
                     </m:oMathParaPr>
                     <m:oMath xmlns:m="http://schemas.openxmlformats.org/officeDocument/2006/math">
+                      <m:sSub>
+                        <m:sSubPr>
+                          <m:ctrlPr>
+                            <a:rPr lang="id-ID" b="0" i="1" smtClean="0">
+                              <a:latin typeface="Cambria Math" panose="02040503050406030204" pitchFamily="18" charset="0"/>
+                            </a:rPr>
+                          </m:ctrlPr>
+                        </m:sSubPr>
+                        <m:e>
+                          <m:r>
+                            <a:rPr lang="en-US" b="0" i="1" smtClean="0">
+                              <a:latin typeface="Cambria Math"/>
+                            </a:rPr>
+                            <m:t>𝐾</m:t>
+                          </m:r>
+                        </m:e>
+                        <m:sub>
+                          <m:r>
+                            <a:rPr lang="id-ID" b="0" i="1" smtClean="0">
+                              <a:latin typeface="Cambria Math" panose="02040503050406030204" pitchFamily="18" charset="0"/>
+                            </a:rPr>
+                            <m:t>𝐷𝐶</m:t>
+                          </m:r>
+                        </m:sub>
+                      </m:sSub>
                       <m:r>
                         <a:rPr lang="en-US" b="0" i="1" smtClean="0">
                           <a:latin typeface="Cambria Math"/>
                         </a:rPr>
-                        <m:t>𝐾</m:t>
+                        <m:t>=1.</m:t>
                       </m:r>
                       <m:r>
-                        <a:rPr lang="en-US" b="0" i="1" smtClean="0">
-                          <a:latin typeface="Cambria Math"/>
+                        <a:rPr lang="id-ID" b="0" i="1" smtClean="0">
+                          <a:latin typeface="Cambria Math" panose="02040503050406030204" pitchFamily="18" charset="0"/>
                         </a:rPr>
-                        <m:t>=1.38</m:t>
+                        <m:t>02</m:t>
                       </m:r>
                     </m:oMath>
                   </m:oMathPara>
@@ -4204,36 +4172,30 @@
                 </a:pPr>
                 <a14:m>
                   <m:oMath xmlns:m="http://schemas.openxmlformats.org/officeDocument/2006/math">
-                    <m:sSub>
-                      <m:sSubPr>
-                        <m:ctrlPr>
-                          <a:rPr lang="en-US" b="0" i="1" smtClean="0">
-                            <a:latin typeface="Cambria Math"/>
-                          </a:rPr>
-                        </m:ctrlPr>
-                      </m:sSubPr>
-                      <m:e>
-                        <m:r>
-                          <a:rPr lang="en-US" b="0" i="1" smtClean="0">
-                            <a:latin typeface="Cambria Math"/>
-                          </a:rPr>
-                          <m:t>𝑡</m:t>
-                        </m:r>
-                      </m:e>
-                      <m:sub>
-                        <m:r>
-                          <a:rPr lang="en-US" b="0" i="1" smtClean="0">
-                            <a:latin typeface="Cambria Math"/>
-                          </a:rPr>
-                          <m:t>𝑑</m:t>
-                        </m:r>
-                      </m:sub>
-                    </m:sSub>
+                    <m:r>
+                      <a:rPr lang="en-US" b="0" i="1" smtClean="0">
+                        <a:latin typeface="Cambria Math" panose="02040503050406030204" pitchFamily="18" charset="0"/>
+                        <a:ea typeface="Cambria Math" panose="02040503050406030204" pitchFamily="18" charset="0"/>
+                      </a:rPr>
+                      <m:t>𝜃</m:t>
+                    </m:r>
                     <m:r>
                       <a:rPr lang="en-US" b="0" i="1" smtClean="0">
                         <a:latin typeface="Cambria Math"/>
                       </a:rPr>
-                      <m:t>=20</m:t>
+                      <m:t>=</m:t>
+                    </m:r>
+                    <m:r>
+                      <a:rPr lang="id-ID" b="0" i="1" smtClean="0">
+                        <a:latin typeface="Cambria Math" panose="02040503050406030204" pitchFamily="18" charset="0"/>
+                      </a:rPr>
+                      <m:t>1</m:t>
+                    </m:r>
+                    <m:r>
+                      <a:rPr lang="en-US" b="0" i="1" smtClean="0">
+                        <a:latin typeface="Cambria Math"/>
+                      </a:rPr>
+                      <m:t>0</m:t>
                     </m:r>
                   </m:oMath>
                 </a14:m>
@@ -4268,7 +4230,25 @@
                       <a:rPr lang="en-US" b="0" i="0" smtClean="0">
                         <a:latin typeface="Cambria Math"/>
                       </a:rPr>
-                      <m:t>212,2</m:t>
+                      <m:t>2</m:t>
+                    </m:r>
+                    <m:r>
+                      <a:rPr lang="id-ID" b="0" i="0" smtClean="0">
+                        <a:latin typeface="Cambria Math" panose="02040503050406030204" pitchFamily="18" charset="0"/>
+                      </a:rPr>
+                      <m:t>43</m:t>
+                    </m:r>
+                    <m:r>
+                      <a:rPr lang="en-US" b="0" i="0" smtClean="0">
+                        <a:latin typeface="Cambria Math"/>
+                      </a:rPr>
+                      <m:t>,</m:t>
+                    </m:r>
+                    <m:r>
+                      <a:rPr lang="id-ID" b="0" i="0" smtClean="0">
+                        <a:latin typeface="Cambria Math" panose="02040503050406030204" pitchFamily="18" charset="0"/>
+                      </a:rPr>
+                      <m:t>6</m:t>
                     </m:r>
                   </m:oMath>
                 </a14:m>
@@ -4311,7 +4291,7 @@
                         <m:dPr>
                           <m:ctrlPr>
                             <a:rPr lang="en-US" b="0" i="1" smtClean="0">
-                              <a:latin typeface="Cambria Math"/>
+                              <a:latin typeface="Cambria Math" panose="02040503050406030204" pitchFamily="18" charset="0"/>
                             </a:rPr>
                           </m:ctrlPr>
                         </m:dPr>
@@ -4334,7 +4314,7 @@
                         <m:fPr>
                           <m:ctrlPr>
                             <a:rPr lang="en-US" b="0" i="1" smtClean="0">
-                              <a:latin typeface="Cambria Math"/>
+                              <a:latin typeface="Cambria Math" panose="02040503050406030204" pitchFamily="18" charset="0"/>
                             </a:rPr>
                           </m:ctrlPr>
                         </m:fPr>
@@ -4343,7 +4323,13 @@
                             <a:rPr lang="en-US" b="0" i="0" smtClean="0">
                               <a:latin typeface="Cambria Math"/>
                             </a:rPr>
-                            <m:t>1.38</m:t>
+                            <m:t>1.</m:t>
+                          </m:r>
+                          <m:r>
+                            <a:rPr lang="id-ID" b="0" i="1" smtClean="0">
+                              <a:latin typeface="Cambria Math" panose="02040503050406030204" pitchFamily="18" charset="0"/>
+                            </a:rPr>
+                            <m:t>01</m:t>
                           </m:r>
                         </m:num>
                         <m:den>
@@ -4351,7 +4337,25 @@
                             <a:rPr lang="en-US" b="0" i="1" smtClean="0">
                               <a:latin typeface="Cambria Math"/>
                             </a:rPr>
-                            <m:t>212.2</m:t>
+                            <m:t>2</m:t>
+                          </m:r>
+                          <m:r>
+                            <a:rPr lang="id-ID" b="0" i="1" smtClean="0">
+                              <a:latin typeface="Cambria Math" panose="02040503050406030204" pitchFamily="18" charset="0"/>
+                            </a:rPr>
+                            <m:t>43</m:t>
+                          </m:r>
+                          <m:r>
+                            <a:rPr lang="en-US" b="0" i="1" smtClean="0">
+                              <a:latin typeface="Cambria Math"/>
+                            </a:rPr>
+                            <m:t>.</m:t>
+                          </m:r>
+                          <m:r>
+                            <a:rPr lang="id-ID" b="0" i="1" smtClean="0">
+                              <a:latin typeface="Cambria Math" panose="02040503050406030204" pitchFamily="18" charset="0"/>
+                            </a:rPr>
+                            <m:t>6</m:t>
                           </m:r>
                           <m:r>
                             <a:rPr lang="en-US" b="0" i="1" smtClean="0">
@@ -4371,7 +4375,7 @@
                         <m:sSupPr>
                           <m:ctrlPr>
                             <a:rPr lang="en-US" b="0" i="1" smtClean="0">
-                              <a:latin typeface="Cambria Math"/>
+                              <a:latin typeface="Cambria Math" panose="02040503050406030204" pitchFamily="18" charset="0"/>
                             </a:rPr>
                           </m:ctrlPr>
                         </m:sSupPr>
@@ -4388,7 +4392,19 @@
                             <a:rPr lang="en-US" b="0" i="1" smtClean="0">
                               <a:latin typeface="Cambria Math"/>
                             </a:rPr>
-                            <m:t>−20</m:t>
+                            <m:t>−</m:t>
+                          </m:r>
+                          <m:r>
+                            <a:rPr lang="id-ID" b="0" i="1" smtClean="0">
+                              <a:latin typeface="Cambria Math" panose="02040503050406030204" pitchFamily="18" charset="0"/>
+                            </a:rPr>
+                            <m:t>1</m:t>
+                          </m:r>
+                          <m:r>
+                            <a:rPr lang="en-US" b="0" i="1" smtClean="0">
+                              <a:latin typeface="Cambria Math"/>
+                            </a:rPr>
+                            <m:t>0</m:t>
                           </m:r>
                           <m:r>
                             <a:rPr lang="en-US" b="0" i="1" smtClean="0">
@@ -4406,7 +4422,7 @@
             </p:txBody>
           </p:sp>
         </mc:Choice>
-        <mc:Fallback xmlns="">
+        <mc:Fallback>
           <p:sp>
             <p:nvSpPr>
               <p:cNvPr id="3" name="Content Placeholder 2"/>
@@ -4418,10 +4434,10 @@
               </p:nvPr>
             </p:nvSpPr>
             <p:spPr>
-              <a:blipFill rotWithShape="1">
+              <a:blipFill>
                 <a:blip r:embed="rId2"/>
                 <a:stretch>
-                  <a:fillRect l="-1630"/>
+                  <a:fillRect l="-1704"/>
                 </a:stretch>
               </a:blipFill>
             </p:spPr>
@@ -4450,13 +4466,6 @@
   <p:clrMapOvr>
     <a:masterClrMapping/>
   </p:clrMapOvr>
-  <p:timing>
-    <p:tnLst>
-      <p:par>
-        <p:cTn id="1" dur="indefinite" restart="never" nodeType="tmRoot"/>
-      </p:par>
-    </p:tnLst>
-  </p:timing>
 </p:sld>
 </file>
 
@@ -4602,13 +4611,6 @@
   <p:clrMapOvr>
     <a:masterClrMapping/>
   </p:clrMapOvr>
-  <p:timing>
-    <p:tnLst>
-      <p:par>
-        <p:cTn id="1" dur="indefinite" restart="never" nodeType="tmRoot"/>
-      </p:par>
-    </p:tnLst>
-  </p:timing>
 </p:sld>
 </file>
 
@@ -4672,15 +4674,7 @@
           <a:p>
             <a:r>
               <a:rPr lang="en-US" dirty="0"/>
-              <a:t>Can the </a:t>
-            </a:r>
-            <a:r>
-              <a:rPr lang="en-US" dirty="0" smtClean="0"/>
-              <a:t>closed loop system </a:t>
-            </a:r>
-            <a:r>
-              <a:rPr lang="en-US" dirty="0"/>
-              <a:t>go unstable? Why?</a:t>
+              <a:t>Can the closed loop system go unstable? Why?</a:t>
             </a:r>
           </a:p>
         </p:txBody>
@@ -4759,13 +4753,6 @@
   <p:clrMapOvr>
     <a:masterClrMapping/>
   </p:clrMapOvr>
-  <p:timing>
-    <p:tnLst>
-      <p:par>
-        <p:cTn id="1" dur="indefinite" restart="never" nodeType="tmRoot"/>
-      </p:par>
-    </p:tnLst>
-  </p:timing>
 </p:sld>
 </file>
 
@@ -4812,8 +4799,8 @@
           </a:p>
         </p:txBody>
       </p:sp>
-      <mc:AlternateContent xmlns:mc="http://schemas.openxmlformats.org/markup-compatibility/2006" xmlns:a14="http://schemas.microsoft.com/office/drawing/2010/main">
-        <mc:Choice Requires="a14">
+      <mc:AlternateContent xmlns:mc="http://schemas.openxmlformats.org/markup-compatibility/2006">
+        <mc:Choice xmlns:a14="http://schemas.microsoft.com/office/drawing/2010/main" Requires="a14">
           <p:sp>
             <p:nvSpPr>
               <p:cNvPr id="3" name="Content Placeholder 2"/>
@@ -4854,7 +4841,7 @@
                         <m:dPr>
                           <m:ctrlPr>
                             <a:rPr lang="en-US" b="0" i="1" smtClean="0">
-                              <a:latin typeface="Cambria Math"/>
+                              <a:latin typeface="Cambria Math" panose="02040503050406030204" pitchFamily="18" charset="0"/>
                             </a:rPr>
                           </m:ctrlPr>
                         </m:dPr>
@@ -4877,7 +4864,7 @@
                         <m:fPr>
                           <m:ctrlPr>
                             <a:rPr lang="en-US" b="0" i="1" smtClean="0">
-                              <a:latin typeface="Cambria Math"/>
+                              <a:latin typeface="Cambria Math" panose="02040503050406030204" pitchFamily="18" charset="0"/>
                             </a:rPr>
                           </m:ctrlPr>
                         </m:fPr>
@@ -4886,7 +4873,13 @@
                             <a:rPr lang="en-US" b="0" i="0" smtClean="0">
                               <a:latin typeface="Cambria Math"/>
                             </a:rPr>
-                            <m:t>1.38</m:t>
+                            <m:t>1.</m:t>
+                          </m:r>
+                          <m:r>
+                            <a:rPr lang="id-ID" b="0" i="1" smtClean="0">
+                              <a:latin typeface="Cambria Math" panose="02040503050406030204" pitchFamily="18" charset="0"/>
+                            </a:rPr>
+                            <m:t>01</m:t>
                           </m:r>
                         </m:num>
                         <m:den>
@@ -4894,7 +4887,13 @@
                             <a:rPr lang="en-US" b="0" i="1" smtClean="0">
                               <a:latin typeface="Cambria Math"/>
                             </a:rPr>
-                            <m:t>212.2</m:t>
+                            <m:t>2</m:t>
+                          </m:r>
+                          <m:r>
+                            <a:rPr lang="id-ID" b="0" i="1" smtClean="0">
+                              <a:latin typeface="Cambria Math" panose="02040503050406030204" pitchFamily="18" charset="0"/>
+                            </a:rPr>
+                            <m:t>43.6</m:t>
                           </m:r>
                           <m:r>
                             <a:rPr lang="en-US" b="0" i="1" smtClean="0">
@@ -4914,7 +4913,7 @@
                         <m:sSupPr>
                           <m:ctrlPr>
                             <a:rPr lang="en-US" b="0" i="1" smtClean="0">
-                              <a:latin typeface="Cambria Math"/>
+                              <a:latin typeface="Cambria Math" panose="02040503050406030204" pitchFamily="18" charset="0"/>
                             </a:rPr>
                           </m:ctrlPr>
                         </m:sSupPr>
@@ -4931,7 +4930,19 @@
                             <a:rPr lang="en-US" b="0" i="1" smtClean="0">
                               <a:latin typeface="Cambria Math"/>
                             </a:rPr>
-                            <m:t>−20</m:t>
+                            <m:t>−</m:t>
+                          </m:r>
+                          <m:r>
+                            <a:rPr lang="id-ID" b="0" i="1" smtClean="0">
+                              <a:latin typeface="Cambria Math" panose="02040503050406030204" pitchFamily="18" charset="0"/>
+                            </a:rPr>
+                            <m:t>1</m:t>
+                          </m:r>
+                          <m:r>
+                            <a:rPr lang="en-US" b="0" i="1" smtClean="0">
+                              <a:latin typeface="Cambria Math"/>
+                            </a:rPr>
+                            <m:t>0</m:t>
                           </m:r>
                           <m:r>
                             <a:rPr lang="en-US" b="0" i="1" smtClean="0">
@@ -4967,7 +4978,7 @@
             </p:txBody>
           </p:sp>
         </mc:Choice>
-        <mc:Fallback xmlns="">
+        <mc:Fallback>
           <p:sp>
             <p:nvSpPr>
               <p:cNvPr id="3" name="Content Placeholder 2"/>
@@ -4979,10 +4990,10 @@
               </p:nvPr>
             </p:nvSpPr>
             <p:spPr>
-              <a:blipFill rotWithShape="1">
+              <a:blipFill>
                 <a:blip r:embed="rId2"/>
                 <a:stretch>
-                  <a:fillRect l="-1630" t="-1752" r="-1037"/>
+                  <a:fillRect l="-1704" t="-1752" r="-1111"/>
                 </a:stretch>
               </a:blipFill>
             </p:spPr>
@@ -5011,13 +5022,6 @@
   <p:clrMapOvr>
     <a:masterClrMapping/>
   </p:clrMapOvr>
-  <p:timing>
-    <p:tnLst>
-      <p:par>
-        <p:cTn id="1" dur="indefinite" restart="never" nodeType="tmRoot"/>
-      </p:par>
-    </p:tnLst>
-  </p:timing>
 </p:sld>
 </file>
 
@@ -5074,7 +5078,12 @@
             <p:ph idx="1"/>
           </p:nvPr>
         </p:nvSpPr>
-        <p:spPr/>
+        <p:spPr>
+          <a:xfrm>
+            <a:off x="457200" y="1600200"/>
+            <a:ext cx="4618856" cy="4525963"/>
+          </a:xfrm>
+        </p:spPr>
         <p:txBody>
           <a:bodyPr/>
           <a:lstStyle/>
@@ -5099,7 +5108,13 @@
       </p:sp>
       <p:pic>
         <p:nvPicPr>
-          <p:cNvPr id="3074" name="Picture 2"/>
+          <p:cNvPr id="5" name="Picture 3">
+            <a:extLst>
+              <a:ext uri="{FF2B5EF4-FFF2-40B4-BE49-F238E27FC236}">
+                <a16:creationId xmlns:a16="http://schemas.microsoft.com/office/drawing/2014/main" id="{0A970F11-67F8-4FFB-A923-8A9BC4591755}"/>
+              </a:ext>
+            </a:extLst>
+          </p:cNvPr>
           <p:cNvPicPr>
             <a:picLocks noChangeAspect="1" noChangeArrowheads="1"/>
           </p:cNvPicPr>
@@ -5120,8 +5135,8 @@
         </p:blipFill>
         <p:spPr bwMode="auto">
           <a:xfrm>
-            <a:off x="2483768" y="3384862"/>
-            <a:ext cx="4687721" cy="2232248"/>
+            <a:off x="5420154" y="1600199"/>
+            <a:ext cx="3266646" cy="4525963"/>
           </a:xfrm>
           <a:prstGeom prst="rect">
             <a:avLst/>
@@ -5171,13 +5186,6 @@
   <p:clrMapOvr>
     <a:masterClrMapping/>
   </p:clrMapOvr>
-  <p:timing>
-    <p:tnLst>
-      <p:par>
-        <p:cTn id="1" dur="indefinite" restart="never" nodeType="tmRoot"/>
-      </p:par>
-    </p:tnLst>
-  </p:timing>
 </p:sld>
 </file>
 
@@ -5224,8 +5232,8 @@
           </a:p>
         </p:txBody>
       </p:sp>
-      <mc:AlternateContent xmlns:mc="http://schemas.openxmlformats.org/markup-compatibility/2006" xmlns:a14="http://schemas.microsoft.com/office/drawing/2010/main">
-        <mc:Choice Requires="a14">
+      <mc:AlternateContent xmlns:mc="http://schemas.openxmlformats.org/markup-compatibility/2006">
+        <mc:Choice xmlns:a14="http://schemas.microsoft.com/office/drawing/2010/main" Requires="a14">
           <p:sp>
             <p:nvSpPr>
               <p:cNvPr id="3" name="Content Placeholder 2"/>
@@ -5267,7 +5275,7 @@
                           <m:chr m:val="̃"/>
                           <m:ctrlPr>
                             <a:rPr lang="en-US" b="0" i="1" smtClean="0">
-                              <a:latin typeface="Cambria Math"/>
+                              <a:latin typeface="Cambria Math" panose="02040503050406030204" pitchFamily="18" charset="0"/>
                             </a:rPr>
                           </m:ctrlPr>
                         </m:accPr>
@@ -5290,22 +5298,16 @@
                         <m:fPr>
                           <m:ctrlPr>
                             <a:rPr lang="en-US" b="0" i="1" smtClean="0">
-                              <a:latin typeface="Cambria Math"/>
+                              <a:latin typeface="Cambria Math" panose="02040503050406030204" pitchFamily="18" charset="0"/>
                             </a:rPr>
                           </m:ctrlPr>
                         </m:fPr>
                         <m:num>
-                          <m:r>
-                            <a:rPr lang="en-US" b="0" i="1" smtClean="0">
-                              <a:latin typeface="Cambria Math"/>
-                            </a:rPr>
-                            <m:t>1.38 </m:t>
-                          </m:r>
                           <m:sSup>
                             <m:sSupPr>
                               <m:ctrlPr>
                                 <a:rPr lang="en-US" b="0" i="1" smtClean="0">
-                                  <a:latin typeface="Cambria Math"/>
+                                  <a:latin typeface="Cambria Math" panose="02040503050406030204" pitchFamily="18" charset="0"/>
                                 </a:rPr>
                               </m:ctrlPr>
                             </m:sSupPr>
@@ -5330,7 +5332,13 @@
                             <a:rPr lang="en-US" b="0" i="1" smtClean="0">
                               <a:latin typeface="Cambria Math"/>
                             </a:rPr>
-                            <m:t> − 0.414 </m:t>
+                            <m:t> − 0.</m:t>
+                          </m:r>
+                          <m:r>
+                            <a:rPr lang="id-ID" b="0" i="1" smtClean="0">
+                              <a:latin typeface="Cambria Math" panose="02040503050406030204" pitchFamily="18" charset="0"/>
+                            </a:rPr>
+                            <m:t>6 </m:t>
                           </m:r>
                           <m:r>
                             <a:rPr lang="en-US" b="0" i="1" smtClean="0">
@@ -5342,7 +5350,7 @@
                             <a:rPr lang="en-US" b="0" i="1" smtClean="0">
                               <a:latin typeface="Cambria Math"/>
                             </a:rPr>
-                            <m:t> + 0.0414</m:t>
+                            <m:t> + 0.12</m:t>
                           </m:r>
                         </m:num>
                         <m:den>
@@ -5350,13 +5358,25 @@
                             <a:rPr lang="en-US" b="0" i="1" smtClean="0">
                               <a:latin typeface="Cambria Math"/>
                             </a:rPr>
-                            <m:t>212.2 </m:t>
+                            <m:t>2</m:t>
+                          </m:r>
+                          <m:r>
+                            <a:rPr lang="id-ID" b="0" i="1" smtClean="0">
+                              <a:latin typeface="Cambria Math" panose="02040503050406030204" pitchFamily="18" charset="0"/>
+                            </a:rPr>
+                            <m:t>43.6</m:t>
+                          </m:r>
+                          <m:r>
+                            <a:rPr lang="en-US" b="0" i="1" smtClean="0">
+                              <a:latin typeface="Cambria Math"/>
+                            </a:rPr>
+                            <m:t> </m:t>
                           </m:r>
                           <m:sSup>
                             <m:sSupPr>
                               <m:ctrlPr>
                                 <a:rPr lang="en-US" b="0" i="1" smtClean="0">
-                                  <a:latin typeface="Cambria Math"/>
+                                  <a:latin typeface="Cambria Math" panose="02040503050406030204" pitchFamily="18" charset="0"/>
                                 </a:rPr>
                               </m:ctrlPr>
                             </m:sSupPr>
@@ -5381,13 +5401,25 @@
                             <a:rPr lang="en-US" b="0" i="1" smtClean="0">
                               <a:latin typeface="Cambria Math"/>
                             </a:rPr>
-                            <m:t> + 64.66 </m:t>
+                            <m:t> +</m:t>
+                          </m:r>
+                          <m:r>
+                            <a:rPr lang="id-ID" b="0" i="1" smtClean="0">
+                              <a:latin typeface="Cambria Math" panose="02040503050406030204" pitchFamily="18" charset="0"/>
+                            </a:rPr>
+                            <m:t>147.2</m:t>
+                          </m:r>
+                          <m:r>
+                            <a:rPr lang="en-US" b="0" i="1" smtClean="0">
+                              <a:latin typeface="Cambria Math"/>
+                            </a:rPr>
+                            <m:t> </m:t>
                           </m:r>
                           <m:sSup>
                             <m:sSupPr>
                               <m:ctrlPr>
                                 <a:rPr lang="en-US" b="0" i="1" smtClean="0">
-                                  <a:latin typeface="Cambria Math"/>
+                                  <a:latin typeface="Cambria Math" panose="02040503050406030204" pitchFamily="18" charset="0"/>
                                 </a:rPr>
                               </m:ctrlPr>
                             </m:sSupPr>
@@ -5412,7 +5444,13 @@
                             <a:rPr lang="en-US" b="0" i="1" smtClean="0">
                               <a:latin typeface="Cambria Math"/>
                             </a:rPr>
-                            <m:t> + 6.666 </m:t>
+                            <m:t> +</m:t>
+                          </m:r>
+                          <m:r>
+                            <a:rPr lang="id-ID" b="0" i="1" smtClean="0">
+                              <a:latin typeface="Cambria Math" panose="02040503050406030204" pitchFamily="18" charset="0"/>
+                            </a:rPr>
+                            <m:t>29.83 </m:t>
                           </m:r>
                           <m:r>
                             <a:rPr lang="en-US" b="0" i="1" smtClean="0">
@@ -5424,7 +5462,7 @@
                             <a:rPr lang="en-US" b="0" i="1" smtClean="0">
                               <a:latin typeface="Cambria Math"/>
                             </a:rPr>
-                            <m:t> + 0.03</m:t>
+                            <m:t> + 0.12</m:t>
                           </m:r>
                         </m:den>
                       </m:f>
@@ -5448,7 +5486,7 @@
             </p:txBody>
           </p:sp>
         </mc:Choice>
-        <mc:Fallback xmlns="">
+        <mc:Fallback>
           <p:sp>
             <p:nvSpPr>
               <p:cNvPr id="3" name="Content Placeholder 2"/>
@@ -5460,10 +5498,10 @@
               </p:nvPr>
             </p:nvSpPr>
             <p:spPr>
-              <a:blipFill rotWithShape="1">
+              <a:blipFill>
                 <a:blip r:embed="rId2"/>
                 <a:stretch>
-                  <a:fillRect l="-1630" t="-1752"/>
+                  <a:fillRect l="-1704" t="-1752"/>
                 </a:stretch>
               </a:blipFill>
             </p:spPr>
@@ -5492,13 +5530,6 @@
   <p:clrMapOvr>
     <a:masterClrMapping/>
   </p:clrMapOvr>
-  <p:timing>
-    <p:tnLst>
-      <p:par>
-        <p:cTn id="1" dur="indefinite" restart="never" nodeType="tmRoot"/>
-      </p:par>
-    </p:tnLst>
-  </p:timing>
 </p:sld>
 </file>
 
@@ -5761,8 +5792,8 @@
           </a:fontRef>
         </p:style>
       </p:cxnSp>
-      <mc:AlternateContent xmlns:mc="http://schemas.openxmlformats.org/markup-compatibility/2006">
-        <mc:Choice xmlns:a14="http://schemas.microsoft.com/office/drawing/2010/main" Requires="a14">
+      <mc:AlternateContent xmlns:mc="http://schemas.openxmlformats.org/markup-compatibility/2006" xmlns:a14="http://schemas.microsoft.com/office/drawing/2010/main">
+        <mc:Choice Requires="a14">
           <p:sp>
             <p:nvSpPr>
               <p:cNvPr id="12" name="TextBox 11"/>
@@ -5810,15 +5841,14 @@
                   </m:oMath>
                 </a14:m>
                 <a:r>
-                  <a:rPr lang="en-US" dirty="0" smtClean="0"/>
+                  <a:rPr lang="en-US" dirty="0"/>
                   <a:t>crossings</a:t>
                 </a:r>
-                <a:endParaRPr lang="en-US" dirty="0"/>
               </a:p>
             </p:txBody>
           </p:sp>
         </mc:Choice>
-        <mc:Fallback>
+        <mc:Fallback xmlns="">
           <p:sp>
             <p:nvSpPr>
               <p:cNvPr id="12" name="TextBox 11"/>
@@ -5857,8 +5887,8 @@
           </p:sp>
         </mc:Fallback>
       </mc:AlternateContent>
-      <mc:AlternateContent xmlns:mc="http://schemas.openxmlformats.org/markup-compatibility/2006">
-        <mc:Choice xmlns:a14="http://schemas.microsoft.com/office/drawing/2010/main" Requires="a14">
+      <mc:AlternateContent xmlns:mc="http://schemas.openxmlformats.org/markup-compatibility/2006" xmlns:a14="http://schemas.microsoft.com/office/drawing/2010/main">
+        <mc:Choice Requires="a14">
           <p:sp>
             <p:nvSpPr>
               <p:cNvPr id="13" name="TextBox 12"/>
@@ -5882,7 +5912,7 @@
               <a:lstStyle/>
               <a:p>
                 <a:r>
-                  <a:rPr lang="en-US" dirty="0" smtClean="0"/>
+                  <a:rPr lang="en-US" dirty="0"/>
                   <a:t>Find the </a:t>
                 </a:r>
                 <a14:m>
@@ -5896,7 +5926,7 @@
                   </m:oMath>
                 </a14:m>
                 <a:r>
-                  <a:rPr lang="en-US" dirty="0" smtClean="0"/>
+                  <a:rPr lang="en-US" dirty="0"/>
                   <a:t> at </a:t>
                 </a:r>
                 <a14:m>
@@ -5924,15 +5954,14 @@
                   </m:oMath>
                 </a14:m>
                 <a:r>
-                  <a:rPr lang="en-US" dirty="0" smtClean="0"/>
+                  <a:rPr lang="en-US" dirty="0"/>
                   <a:t>crossings!</a:t>
                 </a:r>
-                <a:endParaRPr lang="en-US" dirty="0"/>
               </a:p>
             </p:txBody>
           </p:sp>
         </mc:Choice>
-        <mc:Fallback>
+        <mc:Fallback xmlns="">
           <p:sp>
             <p:nvSpPr>
               <p:cNvPr id="13" name="TextBox 12"/>
@@ -5981,13 +6010,6 @@
   <p:clrMapOvr>
     <a:masterClrMapping/>
   </p:clrMapOvr>
-  <p:timing>
-    <p:tnLst>
-      <p:par>
-        <p:cTn id="1" dur="indefinite" restart="never" nodeType="tmRoot"/>
-      </p:par>
-    </p:tnLst>
-  </p:timing>
 </p:sld>
 </file>
 
@@ -6034,8 +6056,8 @@
           </a:p>
         </p:txBody>
       </p:sp>
-      <mc:AlternateContent xmlns:mc="http://schemas.openxmlformats.org/markup-compatibility/2006">
-        <mc:Choice xmlns:a14="http://schemas.microsoft.com/office/drawing/2010/main" Requires="a14">
+      <mc:AlternateContent xmlns:mc="http://schemas.openxmlformats.org/markup-compatibility/2006" xmlns:a14="http://schemas.microsoft.com/office/drawing/2010/main">
+        <mc:Choice Requires="a14">
           <p:sp>
             <p:nvSpPr>
               <p:cNvPr id="3" name="Content Placeholder 2"/>
@@ -6054,7 +6076,7 @@
               <a:lstStyle/>
               <a:p>
                 <a:r>
-                  <a:rPr lang="en-US" dirty="0" smtClean="0"/>
+                  <a:rPr lang="en-US" dirty="0"/>
                   <a:t>Now, briefly summarize how time delay affects a system stability.</a:t>
                 </a:r>
               </a:p>
@@ -6062,27 +6084,27 @@
                 <a:pPr marL="0" indent="0">
                   <a:buNone/>
                 </a:pPr>
-                <a:endParaRPr lang="en-US" dirty="0" smtClean="0"/>
+                <a:endParaRPr lang="en-US" dirty="0"/>
               </a:p>
               <a:p>
                 <a:r>
-                  <a:rPr lang="en-US" dirty="0" smtClean="0"/>
+                  <a:rPr lang="en-US" dirty="0"/>
                   <a:t>Simulate the </a:t>
                 </a:r>
                 <a:r>
-                  <a:rPr lang="en-US" u="sng" dirty="0" smtClean="0"/>
+                  <a:rPr lang="en-US" u="sng" dirty="0"/>
                   <a:t>closed loop system</a:t>
                 </a:r>
                 <a:r>
-                  <a:rPr lang="en-US" dirty="0" smtClean="0"/>
+                  <a:rPr lang="en-US" dirty="0"/>
                   <a:t> using both </a:t>
                 </a:r>
                 <a:r>
-                  <a:rPr lang="en-US" dirty="0" err="1" smtClean="0"/>
+                  <a:rPr lang="en-US" dirty="0" err="1"/>
                   <a:t>Pade</a:t>
                 </a:r>
                 <a:r>
-                  <a:rPr lang="en-US" dirty="0" smtClean="0"/>
+                  <a:rPr lang="en-US" dirty="0"/>
                   <a:t> and TDTC model for </a:t>
                 </a:r>
                 <a14:m>
@@ -6103,7 +6125,7 @@
                       <m:sSubPr>
                         <m:ctrlPr>
                           <a:rPr lang="en-US" b="0" i="1" smtClean="0">
-                            <a:latin typeface="Cambria Math"/>
+                            <a:latin typeface="Cambria Math" panose="02040503050406030204" pitchFamily="18" charset="0"/>
                           </a:rPr>
                         </m:ctrlPr>
                       </m:sSubPr>
@@ -6150,15 +6172,14 @@
                     </m:sSub>
                   </m:oMath>
                 </a14:m>
-                <a:endParaRPr lang="en-US" dirty="0" smtClean="0"/>
+                <a:endParaRPr lang="en-US" dirty="0"/>
               </a:p>
               <a:p>
                 <a:pPr lvl="1"/>
                 <a:r>
-                  <a:rPr lang="en-US" dirty="0" smtClean="0"/>
+                  <a:rPr lang="en-US" dirty="0"/>
                   <a:t>Remember that root locus actually analyze the closed-loop system of a  given open-loop system.</a:t>
                 </a:r>
-                <a:endParaRPr lang="en-US" dirty="0"/>
               </a:p>
               <a:p>
                 <a:pPr marL="0" indent="0">
@@ -6169,7 +6190,7 @@
             </p:txBody>
           </p:sp>
         </mc:Choice>
-        <mc:Fallback>
+        <mc:Fallback xmlns="">
           <p:sp>
             <p:nvSpPr>
               <p:cNvPr id="3" name="Content Placeholder 2"/>
@@ -6213,13 +6234,6 @@
   <p:clrMapOvr>
     <a:masterClrMapping/>
   </p:clrMapOvr>
-  <p:timing>
-    <p:tnLst>
-      <p:par>
-        <p:cTn id="1" dur="indefinite" restart="never" nodeType="tmRoot"/>
-      </p:par>
-    </p:tnLst>
-  </p:timing>
 </p:sld>
 </file>
 
